--- a/analises_exploratorias/E5_ivs_e_envelhecimento/E5_ivs_e_envelhecimento.pptx
+++ b/analises_exploratorias/E5_ivs_e_envelhecimento/E5_ivs_e_envelhecimento.pptx
@@ -1494,7 +1494,7 @@
               <a:rPr lang="en-US" dirty="0"/>
               <a:t>Correlação negativa significa que os setores mais vulneráveis tendem a ser mais jovens. Isso não quer dizer que idosos vulneráveis sejam poucos: quer dizer que eles se espalham por setores de perfis diferentes.
 Como ler: Correlação de postos entre o IVS da referência e os indicadores de envelhecimento, no total e por região.
-O que mostra: Total: ρ = -0,5426 com a proporção de 60+ e -0,6000 com o índice de envelhecimento.</a:t>
+O que mostra: Total: ρ = -0,5426 com a proporção de 60+ e -0,6001 com o índice de envelhecimento.</a:t>
             </a:r>
             <a:endParaRPr lang="en-US" dirty="0"/>
           </a:p>
@@ -10976,7 +10976,7 @@
                           <a:ea typeface="Cambria" pitchFamily="34" charset="-122"/>
                           <a:cs typeface="Cambria" pitchFamily="34" charset="-120"/>
                         </a:rPr>
-                        <a:t>-0,6000</a:t>
+                        <a:t>-0,6001</a:t>
                       </a:r>
                       <a:endParaRPr lang="en-US" sz="1000" dirty="0">
                         <a:latin typeface="Cambria" charset="0"/>
@@ -11070,7 +11070,7 @@
                           <a:ea typeface="Cambria" pitchFamily="34" charset="-122"/>
                           <a:cs typeface="Cambria" pitchFamily="34" charset="-120"/>
                         </a:rPr>
-                        <a:t>-0,3937</a:t>
+                        <a:t>-0,3936</a:t>
                       </a:r>
                       <a:endParaRPr lang="en-US" sz="1000" dirty="0">
                         <a:latin typeface="Cambria" charset="0"/>
@@ -11403,148 +11403,148 @@
                           <a:ea typeface="Cambria" pitchFamily="34" charset="-122"/>
                           <a:cs typeface="Cambria" pitchFamily="34" charset="-120"/>
                         </a:rPr>
-                        <a:t>-0,5011</a:t>
-                      </a:r>
-                      <a:endParaRPr lang="en-US" sz="1000" dirty="0">
-                        <a:latin typeface="Cambria" charset="0"/>
-                        <a:ea typeface="Cambria" charset="0"/>
-                        <a:cs typeface="Cambria" charset="0"/>
-                      </a:endParaRPr>
-                    </a:p>
-                  </a:txBody>
-                  <a:tcPr marL="91440" marR="91440" marT="45720" marB="45720" anchor="ctr">
-                    <a:lnL w="0" cap="flat" cmpd="sng" algn="ctr">
-                      <a:noFill/>
-                    </a:lnL>
-                    <a:lnR w="0" cap="flat" cmpd="sng" algn="ctr">
-                      <a:noFill/>
-                    </a:lnR>
-                    <a:lnT w="0" cap="flat" cmpd="sng" algn="ctr">
-                      <a:noFill/>
-                    </a:lnT>
-                    <a:lnB w="6350" cap="flat" cmpd="sng" algn="ctr">
-                      <a:solidFill>
-                        <a:srgbClr val="E6E4DE"/>
-                      </a:solidFill>
-                      <a:prstDash val="solid"/>
-                      <a:round/>
-                      <a:headEnd type="none" w="med" len="med"/>
-                      <a:tailEnd type="none" w="med" len="med"/>
-                    </a:lnB>
-                  </a:tcPr>
-                </a:tc>
-                <a:tc>
-                  <a:txBody>
-                    <a:bodyPr/>
-                    <a:lstStyle/>
-                    <a:p>
-                      <a:pPr indent="0" marL="0">
-                        <a:buNone/>
-                      </a:pPr>
-                      <a:r>
-                        <a:rPr lang="en-US" sz="1000" dirty="0">
-                          <a:solidFill>
-                            <a:srgbClr val="1A1A18"/>
-                          </a:solidFill>
-                          <a:latin typeface="Cambria" pitchFamily="34" charset="0"/>
-                          <a:ea typeface="Cambria" pitchFamily="34" charset="-122"/>
-                          <a:cs typeface="Cambria" pitchFamily="34" charset="-120"/>
-                        </a:rPr>
-                        <a:t>-0,5521</a:t>
-                      </a:r>
-                      <a:endParaRPr lang="en-US" sz="1000" dirty="0">
-                        <a:latin typeface="Cambria" charset="0"/>
-                        <a:ea typeface="Cambria" charset="0"/>
-                        <a:cs typeface="Cambria" charset="0"/>
-                      </a:endParaRPr>
-                    </a:p>
-                  </a:txBody>
-                  <a:tcPr marL="91440" marR="91440" marT="45720" marB="45720" anchor="ctr">
-                    <a:lnL w="0" cap="flat" cmpd="sng" algn="ctr">
-                      <a:noFill/>
-                    </a:lnL>
-                    <a:lnR w="0" cap="flat" cmpd="sng" algn="ctr">
-                      <a:noFill/>
-                    </a:lnR>
-                    <a:lnT w="0" cap="flat" cmpd="sng" algn="ctr">
-                      <a:noFill/>
-                    </a:lnT>
-                    <a:lnB w="6350" cap="flat" cmpd="sng" algn="ctr">
-                      <a:solidFill>
-                        <a:srgbClr val="E6E4DE"/>
-                      </a:solidFill>
-                      <a:prstDash val="solid"/>
-                      <a:round/>
-                      <a:headEnd type="none" w="med" len="med"/>
-                      <a:tailEnd type="none" w="med" len="med"/>
-                    </a:lnB>
-                  </a:tcPr>
-                </a:tc>
-                <a:tc>
-                  <a:txBody>
-                    <a:bodyPr/>
-                    <a:lstStyle/>
-                    <a:p>
-                      <a:pPr indent="0" marL="0">
-                        <a:buNone/>
-                      </a:pPr>
-                      <a:r>
-                        <a:rPr lang="en-US" sz="1000" dirty="0">
-                          <a:solidFill>
-                            <a:srgbClr val="1A1A18"/>
-                          </a:solidFill>
-                          <a:latin typeface="Cambria" pitchFamily="34" charset="0"/>
-                          <a:ea typeface="Cambria" pitchFamily="34" charset="-122"/>
-                          <a:cs typeface="Cambria" pitchFamily="34" charset="-120"/>
-                        </a:rPr>
-                        <a:t>-0,4763</a:t>
-                      </a:r>
-                      <a:endParaRPr lang="en-US" sz="1000" dirty="0">
-                        <a:latin typeface="Cambria" charset="0"/>
-                        <a:ea typeface="Cambria" charset="0"/>
-                        <a:cs typeface="Cambria" charset="0"/>
-                      </a:endParaRPr>
-                    </a:p>
-                  </a:txBody>
-                  <a:tcPr marL="91440" marR="91440" marT="45720" marB="45720" anchor="ctr">
-                    <a:lnL w="0" cap="flat" cmpd="sng" algn="ctr">
-                      <a:noFill/>
-                    </a:lnL>
-                    <a:lnR w="0" cap="flat" cmpd="sng" algn="ctr">
-                      <a:noFill/>
-                    </a:lnR>
-                    <a:lnT w="0" cap="flat" cmpd="sng" algn="ctr">
-                      <a:noFill/>
-                    </a:lnT>
-                    <a:lnB w="6350" cap="flat" cmpd="sng" algn="ctr">
-                      <a:solidFill>
-                        <a:srgbClr val="E6E4DE"/>
-                      </a:solidFill>
-                      <a:prstDash val="solid"/>
-                      <a:round/>
-                      <a:headEnd type="none" w="med" len="med"/>
-                      <a:tailEnd type="none" w="med" len="med"/>
-                    </a:lnB>
-                  </a:tcPr>
-                </a:tc>
-                <a:tc>
-                  <a:txBody>
-                    <a:bodyPr/>
-                    <a:lstStyle/>
-                    <a:p>
-                      <a:pPr indent="0" marL="0">
-                        <a:buNone/>
-                      </a:pPr>
-                      <a:r>
-                        <a:rPr lang="en-US" sz="1000" dirty="0">
-                          <a:solidFill>
-                            <a:srgbClr val="1A1A18"/>
-                          </a:solidFill>
-                          <a:latin typeface="Cambria" pitchFamily="34" charset="0"/>
-                          <a:ea typeface="Cambria" pitchFamily="34" charset="-122"/>
-                          <a:cs typeface="Cambria" pitchFamily="34" charset="-120"/>
-                        </a:rPr>
-                        <a:t>-0,2795</a:t>
+                        <a:t>-0,5012</a:t>
+                      </a:r>
+                      <a:endParaRPr lang="en-US" sz="1000" dirty="0">
+                        <a:latin typeface="Cambria" charset="0"/>
+                        <a:ea typeface="Cambria" charset="0"/>
+                        <a:cs typeface="Cambria" charset="0"/>
+                      </a:endParaRPr>
+                    </a:p>
+                  </a:txBody>
+                  <a:tcPr marL="91440" marR="91440" marT="45720" marB="45720" anchor="ctr">
+                    <a:lnL w="0" cap="flat" cmpd="sng" algn="ctr">
+                      <a:noFill/>
+                    </a:lnL>
+                    <a:lnR w="0" cap="flat" cmpd="sng" algn="ctr">
+                      <a:noFill/>
+                    </a:lnR>
+                    <a:lnT w="0" cap="flat" cmpd="sng" algn="ctr">
+                      <a:noFill/>
+                    </a:lnT>
+                    <a:lnB w="6350" cap="flat" cmpd="sng" algn="ctr">
+                      <a:solidFill>
+                        <a:srgbClr val="E6E4DE"/>
+                      </a:solidFill>
+                      <a:prstDash val="solid"/>
+                      <a:round/>
+                      <a:headEnd type="none" w="med" len="med"/>
+                      <a:tailEnd type="none" w="med" len="med"/>
+                    </a:lnB>
+                  </a:tcPr>
+                </a:tc>
+                <a:tc>
+                  <a:txBody>
+                    <a:bodyPr/>
+                    <a:lstStyle/>
+                    <a:p>
+                      <a:pPr indent="0" marL="0">
+                        <a:buNone/>
+                      </a:pPr>
+                      <a:r>
+                        <a:rPr lang="en-US" sz="1000" dirty="0">
+                          <a:solidFill>
+                            <a:srgbClr val="1A1A18"/>
+                          </a:solidFill>
+                          <a:latin typeface="Cambria" pitchFamily="34" charset="0"/>
+                          <a:ea typeface="Cambria" pitchFamily="34" charset="-122"/>
+                          <a:cs typeface="Cambria" pitchFamily="34" charset="-120"/>
+                        </a:rPr>
+                        <a:t>-0,5522</a:t>
+                      </a:r>
+                      <a:endParaRPr lang="en-US" sz="1000" dirty="0">
+                        <a:latin typeface="Cambria" charset="0"/>
+                        <a:ea typeface="Cambria" charset="0"/>
+                        <a:cs typeface="Cambria" charset="0"/>
+                      </a:endParaRPr>
+                    </a:p>
+                  </a:txBody>
+                  <a:tcPr marL="91440" marR="91440" marT="45720" marB="45720" anchor="ctr">
+                    <a:lnL w="0" cap="flat" cmpd="sng" algn="ctr">
+                      <a:noFill/>
+                    </a:lnL>
+                    <a:lnR w="0" cap="flat" cmpd="sng" algn="ctr">
+                      <a:noFill/>
+                    </a:lnR>
+                    <a:lnT w="0" cap="flat" cmpd="sng" algn="ctr">
+                      <a:noFill/>
+                    </a:lnT>
+                    <a:lnB w="6350" cap="flat" cmpd="sng" algn="ctr">
+                      <a:solidFill>
+                        <a:srgbClr val="E6E4DE"/>
+                      </a:solidFill>
+                      <a:prstDash val="solid"/>
+                      <a:round/>
+                      <a:headEnd type="none" w="med" len="med"/>
+                      <a:tailEnd type="none" w="med" len="med"/>
+                    </a:lnB>
+                  </a:tcPr>
+                </a:tc>
+                <a:tc>
+                  <a:txBody>
+                    <a:bodyPr/>
+                    <a:lstStyle/>
+                    <a:p>
+                      <a:pPr indent="0" marL="0">
+                        <a:buNone/>
+                      </a:pPr>
+                      <a:r>
+                        <a:rPr lang="en-US" sz="1000" dirty="0">
+                          <a:solidFill>
+                            <a:srgbClr val="1A1A18"/>
+                          </a:solidFill>
+                          <a:latin typeface="Cambria" pitchFamily="34" charset="0"/>
+                          <a:ea typeface="Cambria" pitchFamily="34" charset="-122"/>
+                          <a:cs typeface="Cambria" pitchFamily="34" charset="-120"/>
+                        </a:rPr>
+                        <a:t>-0,4764</a:t>
+                      </a:r>
+                      <a:endParaRPr lang="en-US" sz="1000" dirty="0">
+                        <a:latin typeface="Cambria" charset="0"/>
+                        <a:ea typeface="Cambria" charset="0"/>
+                        <a:cs typeface="Cambria" charset="0"/>
+                      </a:endParaRPr>
+                    </a:p>
+                  </a:txBody>
+                  <a:tcPr marL="91440" marR="91440" marT="45720" marB="45720" anchor="ctr">
+                    <a:lnL w="0" cap="flat" cmpd="sng" algn="ctr">
+                      <a:noFill/>
+                    </a:lnL>
+                    <a:lnR w="0" cap="flat" cmpd="sng" algn="ctr">
+                      <a:noFill/>
+                    </a:lnR>
+                    <a:lnT w="0" cap="flat" cmpd="sng" algn="ctr">
+                      <a:noFill/>
+                    </a:lnT>
+                    <a:lnB w="6350" cap="flat" cmpd="sng" algn="ctr">
+                      <a:solidFill>
+                        <a:srgbClr val="E6E4DE"/>
+                      </a:solidFill>
+                      <a:prstDash val="solid"/>
+                      <a:round/>
+                      <a:headEnd type="none" w="med" len="med"/>
+                      <a:tailEnd type="none" w="med" len="med"/>
+                    </a:lnB>
+                  </a:tcPr>
+                </a:tc>
+                <a:tc>
+                  <a:txBody>
+                    <a:bodyPr/>
+                    <a:lstStyle/>
+                    <a:p>
+                      <a:pPr indent="0" marL="0">
+                        <a:buNone/>
+                      </a:pPr>
+                      <a:r>
+                        <a:rPr lang="en-US" sz="1000" dirty="0">
+                          <a:solidFill>
+                            <a:srgbClr val="1A1A18"/>
+                          </a:solidFill>
+                          <a:latin typeface="Cambria" pitchFamily="34" charset="0"/>
+                          <a:ea typeface="Cambria" pitchFamily="34" charset="-122"/>
+                          <a:cs typeface="Cambria" pitchFamily="34" charset="-120"/>
+                        </a:rPr>
+                        <a:t>-0,2794</a:t>
                       </a:r>
                       <a:endParaRPr lang="en-US" sz="1000" dirty="0">
                         <a:latin typeface="Cambria" charset="0"/>
@@ -12425,7 +12425,7 @@
                 <a:ea typeface="Cambria" pitchFamily="34" charset="-122"/>
                 <a:cs typeface="Cambria" pitchFamily="34" charset="-120"/>
               </a:rPr>
-              <a:t>Total: ρ = -0,5426 com a proporção de 60+ e -0,6000 com o índice de envelhecimento.</a:t>
+              <a:t>Total: ρ = -0,5426 com a proporção de 60+ e -0,6001 com o índice de envelhecimento.</a:t>
             </a:r>
             <a:endParaRPr lang="en-US" sz="1250" dirty="0"/>
           </a:p>
